--- a/sunum/BusraDemir_NazeninTatar_BIM322_Sunum.pptx
+++ b/sunum/BusraDemir_NazeninTatar_BIM322_Sunum.pptx
@@ -11614,7 +11614,7 @@
         <p:spPr>
           <a:xfrm>
             <a:off x="2593599" y="3474074"/>
-            <a:ext cx="741024" cy="275826"/>
+            <a:ext cx="594769" cy="221387"/>
           </a:xfrm>
           <a:prstGeom prst="rect">
             <a:avLst/>
@@ -11639,7 +11639,7 @@
         <p:spPr>
           <a:xfrm>
             <a:off x="2405591" y="3474074"/>
-            <a:ext cx="188008" cy="137913"/>
+            <a:ext cx="188008" cy="110694"/>
           </a:xfrm>
           <a:prstGeom prst="straightConnector1">
             <a:avLst/>
